--- a/연구자료/260605_논문리뷰세미나 발표자료.pptx
+++ b/연구자료/260605_논문리뷰세미나 발표자료.pptx
@@ -284,7 +284,7 @@
             <a:fld id="{33074436-1BEA-4F09-AD5C-9DF87C96BF5A}" type="datetimeFigureOut">
               <a:rPr lang="ko-KR" altLang="en-US" smtClean="0"/>
               <a:pPr/>
-              <a:t>2026-06-04</a:t>
+              <a:t>2026-06-05</a:t>
             </a:fld>
             <a:endParaRPr lang="ko-KR" altLang="en-US" dirty="0"/>
           </a:p>
@@ -1094,8 +1094,173 @@
                 <a:ea typeface="KoPub돋움체 Medium" panose="00000600000000000000" pitchFamily="2" charset="-127"/>
                 <a:cs typeface="+mn-cs"/>
               </a:rPr>
-              <a:t>이렇게 답하세요: '맞습니다, 그게 이 기준의 한계입니다. 그래서 이건 어떤 사람이 상대적으로 근육 질이 나쁜지를 보는 탐색적 기준입니다. 실제 임상에서 쓰려면 어느 수준부터 건강에 영향을 주는지 별도로 검증이 필요합니다. 이 연구는 그 필요성을 처음 대규모로 보여준 것에 의미가 있습니다.'</a:t>
-            </a:r>
+              <a:t>이렇게 답하세요: '맞습니다, 그게 이 기준의 한계입니다. 그래서 이건 어떤 사람이 상대적으로 근육 질이 나쁜지를 보는 탐색적 기준입니다. 실제 임상에서 쓰려면 어느 수준부터 건강에 영향을 주는지 별도로 검증이 필요합니다. 이 연구는 그 필요성을 처음 대규모로 보여준 것에 의미가 있습니다.’</a:t>
+            </a:r>
+            <a:endParaRPr lang="en-US" altLang="ko-KR" sz="1200" b="0" i="0" u="none" strike="noStrike" kern="1200" dirty="0">
+              <a:solidFill>
+                <a:schemeClr val="tx1"/>
+              </a:solidFill>
+              <a:effectLst/>
+              <a:latin typeface="KoPub돋움체 Medium" panose="00000600000000000000" pitchFamily="2" charset="-127"/>
+              <a:ea typeface="KoPub돋움체 Medium" panose="00000600000000000000" pitchFamily="2" charset="-127"/>
+              <a:cs typeface="+mn-cs"/>
+            </a:endParaRPr>
+          </a:p>
+          <a:p>
+            <a:pPr fontAlgn="base"/>
+            <a:endParaRPr lang="en-US" altLang="ko-KR" sz="1200" b="0" i="0" u="none" strike="noStrike" kern="1200" dirty="0">
+              <a:solidFill>
+                <a:schemeClr val="tx1"/>
+              </a:solidFill>
+              <a:effectLst/>
+              <a:latin typeface="KoPub돋움체 Medium" panose="00000600000000000000" pitchFamily="2" charset="-127"/>
+              <a:ea typeface="KoPub돋움체 Medium" panose="00000600000000000000" pitchFamily="2" charset="-127"/>
+              <a:cs typeface="+mn-cs"/>
+            </a:endParaRPr>
+          </a:p>
+          <a:p>
+            <a:pPr fontAlgn="base"/>
+            <a:r>
+              <a:rPr lang="en-US" altLang="ko-KR" sz="1200" b="0" i="0" kern="1200" dirty="0">
+                <a:solidFill>
+                  <a:schemeClr val="tx1"/>
+                </a:solidFill>
+                <a:effectLst/>
+                <a:latin typeface="KoPub돋움체 Medium" panose="00000600000000000000" pitchFamily="2" charset="-127"/>
+                <a:ea typeface="KoPub돋움체 Medium" panose="00000600000000000000" pitchFamily="2" charset="-127"/>
+                <a:cs typeface="+mn-cs"/>
+              </a:rPr>
+              <a:t>PDFF</a:t>
+            </a:r>
+            <a:r>
+              <a:rPr lang="ko-KR" altLang="en-US" sz="1200" b="0" i="0" kern="1200" dirty="0">
+                <a:solidFill>
+                  <a:schemeClr val="tx1"/>
+                </a:solidFill>
+                <a:effectLst/>
+                <a:latin typeface="KoPub돋움체 Medium" panose="00000600000000000000" pitchFamily="2" charset="-127"/>
+                <a:ea typeface="KoPub돋움체 Medium" panose="00000600000000000000" pitchFamily="2" charset="-127"/>
+                <a:cs typeface="+mn-cs"/>
+              </a:rPr>
+              <a:t>는 </a:t>
+            </a:r>
+            <a:r>
+              <a:rPr lang="en-US" altLang="ko-KR" sz="1200" b="0" i="0" kern="1200" dirty="0">
+                <a:solidFill>
+                  <a:schemeClr val="tx1"/>
+                </a:solidFill>
+                <a:effectLst/>
+                <a:latin typeface="KoPub돋움체 Medium" panose="00000600000000000000" pitchFamily="2" charset="-127"/>
+                <a:ea typeface="KoPub돋움체 Medium" panose="00000600000000000000" pitchFamily="2" charset="-127"/>
+                <a:cs typeface="+mn-cs"/>
+              </a:rPr>
+              <a:t>'proton density fat fraction'</a:t>
+            </a:r>
+            <a:r>
+              <a:rPr lang="ko-KR" altLang="en-US" sz="1200" b="0" i="0" kern="1200" dirty="0">
+                <a:solidFill>
+                  <a:schemeClr val="tx1"/>
+                </a:solidFill>
+                <a:effectLst/>
+                <a:latin typeface="KoPub돋움체 Medium" panose="00000600000000000000" pitchFamily="2" charset="-127"/>
+                <a:ea typeface="KoPub돋움체 Medium" panose="00000600000000000000" pitchFamily="2" charset="-127"/>
+                <a:cs typeface="+mn-cs"/>
+              </a:rPr>
+              <a:t>의 약자로</a:t>
+            </a:r>
+            <a:r>
+              <a:rPr lang="en-US" altLang="ko-KR" sz="1200" b="0" i="0" kern="1200" dirty="0">
+                <a:solidFill>
+                  <a:schemeClr val="tx1"/>
+                </a:solidFill>
+                <a:effectLst/>
+                <a:latin typeface="KoPub돋움체 Medium" panose="00000600000000000000" pitchFamily="2" charset="-127"/>
+                <a:ea typeface="KoPub돋움체 Medium" panose="00000600000000000000" pitchFamily="2" charset="-127"/>
+                <a:cs typeface="+mn-cs"/>
+              </a:rPr>
+              <a:t>, </a:t>
+            </a:r>
+            <a:r>
+              <a:rPr lang="ko-KR" altLang="en-US" sz="1200" b="0" i="0" kern="1200" dirty="0">
+                <a:solidFill>
+                  <a:schemeClr val="tx1"/>
+                </a:solidFill>
+                <a:effectLst/>
+                <a:latin typeface="KoPub돋움체 Medium" panose="00000600000000000000" pitchFamily="2" charset="-127"/>
+                <a:ea typeface="KoPub돋움체 Medium" panose="00000600000000000000" pitchFamily="2" charset="-127"/>
+                <a:cs typeface="+mn-cs"/>
+              </a:rPr>
+              <a:t>양성자 밀도 지방 분획을 의미합니다</a:t>
+            </a:r>
+            <a:r>
+              <a:rPr lang="en-US" altLang="ko-KR" sz="1200" b="0" i="0" kern="1200" dirty="0">
+                <a:solidFill>
+                  <a:schemeClr val="tx1"/>
+                </a:solidFill>
+                <a:effectLst/>
+                <a:latin typeface="KoPub돋움체 Medium" panose="00000600000000000000" pitchFamily="2" charset="-127"/>
+                <a:ea typeface="KoPub돋움체 Medium" panose="00000600000000000000" pitchFamily="2" charset="-127"/>
+                <a:cs typeface="+mn-cs"/>
+              </a:rPr>
+              <a:t>. </a:t>
+            </a:r>
+            <a:r>
+              <a:rPr lang="ko-KR" altLang="en-US" sz="1200" b="0" i="0" kern="1200" dirty="0">
+                <a:solidFill>
+                  <a:schemeClr val="tx1"/>
+                </a:solidFill>
+                <a:effectLst/>
+                <a:latin typeface="KoPub돋움체 Medium" panose="00000600000000000000" pitchFamily="2" charset="-127"/>
+                <a:ea typeface="KoPub돋움체 Medium" panose="00000600000000000000" pitchFamily="2" charset="-127"/>
+                <a:cs typeface="+mn-cs"/>
+              </a:rPr>
+              <a:t>이는 자기공명영상</a:t>
+            </a:r>
+            <a:r>
+              <a:rPr lang="en-US" altLang="ko-KR" sz="1200" b="0" i="0" kern="1200" dirty="0">
+                <a:solidFill>
+                  <a:schemeClr val="tx1"/>
+                </a:solidFill>
+                <a:effectLst/>
+                <a:latin typeface="KoPub돋움체 Medium" panose="00000600000000000000" pitchFamily="2" charset="-127"/>
+                <a:ea typeface="KoPub돋움체 Medium" panose="00000600000000000000" pitchFamily="2" charset="-127"/>
+                <a:cs typeface="+mn-cs"/>
+              </a:rPr>
+              <a:t>(MRI)</a:t>
+            </a:r>
+            <a:r>
+              <a:rPr lang="ko-KR" altLang="en-US" sz="1200" b="0" i="0" kern="1200" dirty="0">
+                <a:solidFill>
+                  <a:schemeClr val="tx1"/>
+                </a:solidFill>
+                <a:effectLst/>
+                <a:latin typeface="KoPub돋움체 Medium" panose="00000600000000000000" pitchFamily="2" charset="-127"/>
+                <a:ea typeface="KoPub돋움체 Medium" panose="00000600000000000000" pitchFamily="2" charset="-127"/>
+                <a:cs typeface="+mn-cs"/>
+              </a:rPr>
+              <a:t>에서 조직 내 지방의 양을 측정하는 데 사용되는 지표입니다</a:t>
+            </a:r>
+            <a:r>
+              <a:rPr lang="en-US" altLang="ko-KR" sz="1200" b="0" i="0" kern="1200" dirty="0">
+                <a:solidFill>
+                  <a:schemeClr val="tx1"/>
+                </a:solidFill>
+                <a:effectLst/>
+                <a:latin typeface="KoPub돋움체 Medium" panose="00000600000000000000" pitchFamily="2" charset="-127"/>
+                <a:ea typeface="KoPub돋움체 Medium" panose="00000600000000000000" pitchFamily="2" charset="-127"/>
+                <a:cs typeface="+mn-cs"/>
+              </a:rPr>
+              <a:t>.</a:t>
+            </a:r>
+            <a:endParaRPr lang="ko-KR" altLang="ko-KR" sz="1200" b="0" i="0" u="none" strike="noStrike" kern="1200" dirty="0">
+              <a:solidFill>
+                <a:schemeClr val="tx1"/>
+              </a:solidFill>
+              <a:effectLst/>
+              <a:latin typeface="KoPub돋움체 Medium" panose="00000600000000000000" pitchFamily="2" charset="-127"/>
+              <a:ea typeface="KoPub돋움체 Medium" panose="00000600000000000000" pitchFamily="2" charset="-127"/>
+              <a:cs typeface="+mn-cs"/>
+            </a:endParaRPr>
           </a:p>
           <a:p>
             <a:endParaRPr lang="en-US" altLang="ko-KR" sz="1200" b="0" kern="1200" dirty="0">
@@ -1316,7 +1481,6 @@
             </a:r>
           </a:p>
           <a:p>
-            <a:pPr fontAlgn="base"/>
             <a:r>
               <a:rPr lang="ko-KR" altLang="ko-KR" sz="1200" b="0" i="0" u="none" strike="noStrike" kern="1200" dirty="0">
                 <a:solidFill>
@@ -1375,7 +1539,309 @@
                 <a:ea typeface="KoPub돋움체 Medium" panose="00000600000000000000" pitchFamily="2" charset="-127"/>
                 <a:cs typeface="+mn-cs"/>
               </a:rPr>
-              <a:t> 모델입니다. 좀 더 현실적인 방법인데요. 사람이 사망에 이르는 과정에는 중간 단계가 있잖아요. 심장마비를 겪고, 또 뇌졸중을 겪고, 그 다음 사망하는 </a:t>
+              <a:t> 모델입니다. 좀 더 현실적인 방법인데요.</a:t>
+            </a:r>
+            <a:r>
+              <a:rPr lang="en-US" altLang="ko-KR" sz="1200" b="0" i="0" u="none" strike="noStrike" kern="1200" dirty="0">
+                <a:solidFill>
+                  <a:schemeClr val="tx1"/>
+                </a:solidFill>
+                <a:effectLst/>
+                <a:latin typeface="KoPub돋움체 Medium" panose="00000600000000000000" pitchFamily="2" charset="-127"/>
+                <a:ea typeface="KoPub돋움체 Medium" panose="00000600000000000000" pitchFamily="2" charset="-127"/>
+                <a:cs typeface="+mn-cs"/>
+              </a:rPr>
+              <a:t> </a:t>
+            </a:r>
+            <a:r>
+              <a:rPr lang="en-US" altLang="ko-KR" sz="1200" b="0" i="0" kern="1200" dirty="0">
+                <a:solidFill>
+                  <a:schemeClr val="tx1"/>
+                </a:solidFill>
+                <a:effectLst/>
+                <a:latin typeface="KoPub돋움체 Medium" panose="00000600000000000000" pitchFamily="2" charset="-127"/>
+                <a:ea typeface="KoPub돋움체 Medium" panose="00000600000000000000" pitchFamily="2" charset="-127"/>
+                <a:cs typeface="+mn-cs"/>
+              </a:rPr>
+              <a:t>MACE</a:t>
+            </a:r>
+            <a:r>
+              <a:rPr lang="ko-KR" altLang="en-US" sz="1200" b="0" i="0" kern="1200" dirty="0">
+                <a:solidFill>
+                  <a:schemeClr val="tx1"/>
+                </a:solidFill>
+                <a:effectLst/>
+                <a:latin typeface="KoPub돋움체 Medium" panose="00000600000000000000" pitchFamily="2" charset="-127"/>
+                <a:ea typeface="KoPub돋움체 Medium" panose="00000600000000000000" pitchFamily="2" charset="-127"/>
+                <a:cs typeface="+mn-cs"/>
+              </a:rPr>
+              <a:t>는 </a:t>
+            </a:r>
+            <a:r>
+              <a:rPr lang="en-US" altLang="ko-KR" sz="1200" b="0" i="0" kern="1200" dirty="0">
+                <a:solidFill>
+                  <a:schemeClr val="tx1"/>
+                </a:solidFill>
+                <a:effectLst/>
+                <a:latin typeface="KoPub돋움체 Medium" panose="00000600000000000000" pitchFamily="2" charset="-127"/>
+                <a:ea typeface="KoPub돋움체 Medium" panose="00000600000000000000" pitchFamily="2" charset="-127"/>
+                <a:cs typeface="+mn-cs"/>
+              </a:rPr>
+              <a:t>'Major Adverse Cardiovascular Event'</a:t>
+            </a:r>
+            <a:r>
+              <a:rPr lang="ko-KR" altLang="en-US" sz="1200" b="0" i="0" kern="1200" dirty="0">
+                <a:solidFill>
+                  <a:schemeClr val="tx1"/>
+                </a:solidFill>
+                <a:effectLst/>
+                <a:latin typeface="KoPub돋움체 Medium" panose="00000600000000000000" pitchFamily="2" charset="-127"/>
+                <a:ea typeface="KoPub돋움체 Medium" panose="00000600000000000000" pitchFamily="2" charset="-127"/>
+                <a:cs typeface="+mn-cs"/>
+              </a:rPr>
+              <a:t>의 약자로</a:t>
+            </a:r>
+            <a:r>
+              <a:rPr lang="en-US" altLang="ko-KR" sz="1200" b="0" i="0" kern="1200" dirty="0">
+                <a:solidFill>
+                  <a:schemeClr val="tx1"/>
+                </a:solidFill>
+                <a:effectLst/>
+                <a:latin typeface="KoPub돋움체 Medium" panose="00000600000000000000" pitchFamily="2" charset="-127"/>
+                <a:ea typeface="KoPub돋움체 Medium" panose="00000600000000000000" pitchFamily="2" charset="-127"/>
+                <a:cs typeface="+mn-cs"/>
+              </a:rPr>
+              <a:t>, </a:t>
+            </a:r>
+            <a:r>
+              <a:rPr lang="ko-KR" altLang="en-US" sz="1200" b="0" i="0" kern="1200" dirty="0">
+                <a:solidFill>
+                  <a:schemeClr val="tx1"/>
+                </a:solidFill>
+                <a:effectLst/>
+                <a:latin typeface="KoPub돋움체 Medium" panose="00000600000000000000" pitchFamily="2" charset="-127"/>
+                <a:ea typeface="KoPub돋움체 Medium" panose="00000600000000000000" pitchFamily="2" charset="-127"/>
+                <a:cs typeface="+mn-cs"/>
+              </a:rPr>
+              <a:t>주요 심혈관 부작용을 의미합니다</a:t>
+            </a:r>
+            <a:r>
+              <a:rPr lang="en-US" altLang="ko-KR" sz="1200" b="0" i="0" kern="1200" dirty="0">
+                <a:solidFill>
+                  <a:schemeClr val="tx1"/>
+                </a:solidFill>
+                <a:effectLst/>
+                <a:latin typeface="KoPub돋움체 Medium" panose="00000600000000000000" pitchFamily="2" charset="-127"/>
+                <a:ea typeface="KoPub돋움체 Medium" panose="00000600000000000000" pitchFamily="2" charset="-127"/>
+                <a:cs typeface="+mn-cs"/>
+              </a:rPr>
+              <a:t>.</a:t>
+            </a:r>
+          </a:p>
+          <a:p>
+            <a:r>
+              <a:rPr lang="ko-KR" altLang="en-US" sz="1200" b="0" i="0" kern="1200" dirty="0">
+                <a:solidFill>
+                  <a:schemeClr val="tx1"/>
+                </a:solidFill>
+                <a:effectLst/>
+                <a:latin typeface="KoPub돋움체 Medium" panose="00000600000000000000" pitchFamily="2" charset="-127"/>
+                <a:ea typeface="KoPub돋움체 Medium" panose="00000600000000000000" pitchFamily="2" charset="-127"/>
+                <a:cs typeface="+mn-cs"/>
+              </a:rPr>
+              <a:t>이 연구에서는 </a:t>
+            </a:r>
+            <a:r>
+              <a:rPr lang="en-US" altLang="ko-KR" sz="1200" b="0" i="0" kern="1200" dirty="0">
+                <a:solidFill>
+                  <a:schemeClr val="tx1"/>
+                </a:solidFill>
+                <a:effectLst/>
+                <a:latin typeface="KoPub돋움체 Medium" panose="00000600000000000000" pitchFamily="2" charset="-127"/>
+                <a:ea typeface="KoPub돋움체 Medium" panose="00000600000000000000" pitchFamily="2" charset="-127"/>
+                <a:cs typeface="+mn-cs"/>
+              </a:rPr>
+              <a:t>MACE</a:t>
+            </a:r>
+            <a:r>
+              <a:rPr lang="ko-KR" altLang="en-US" sz="1200" b="0" i="0" kern="1200" dirty="0">
+                <a:solidFill>
+                  <a:schemeClr val="tx1"/>
+                </a:solidFill>
+                <a:effectLst/>
+                <a:latin typeface="KoPub돋움체 Medium" panose="00000600000000000000" pitchFamily="2" charset="-127"/>
+                <a:ea typeface="KoPub돋움체 Medium" panose="00000600000000000000" pitchFamily="2" charset="-127"/>
+                <a:cs typeface="+mn-cs"/>
+              </a:rPr>
+              <a:t>를 다음과 같은 사건들로 정의했습니다</a:t>
+            </a:r>
+            <a:r>
+              <a:rPr lang="en-US" altLang="ko-KR" sz="1200" b="0" i="0" kern="1200" dirty="0">
+                <a:solidFill>
+                  <a:schemeClr val="tx1"/>
+                </a:solidFill>
+                <a:effectLst/>
+                <a:latin typeface="KoPub돋움체 Medium" panose="00000600000000000000" pitchFamily="2" charset="-127"/>
+                <a:ea typeface="KoPub돋움체 Medium" panose="00000600000000000000" pitchFamily="2" charset="-127"/>
+                <a:cs typeface="+mn-cs"/>
+              </a:rPr>
+              <a:t>: </a:t>
+            </a:r>
+            <a:r>
+              <a:rPr lang="ko-KR" altLang="en-US" sz="1200" b="0" i="0" kern="1200" dirty="0">
+                <a:solidFill>
+                  <a:schemeClr val="tx1"/>
+                </a:solidFill>
+                <a:effectLst/>
+                <a:latin typeface="KoPub돋움체 Medium" panose="00000600000000000000" pitchFamily="2" charset="-127"/>
+                <a:ea typeface="KoPub돋움체 Medium" panose="00000600000000000000" pitchFamily="2" charset="-127"/>
+                <a:cs typeface="+mn-cs"/>
+              </a:rPr>
+              <a:t>뇌혈관 질환</a:t>
+            </a:r>
+            <a:r>
+              <a:rPr lang="en-US" altLang="ko-KR" sz="1200" b="0" i="0" kern="1200" dirty="0">
+                <a:solidFill>
+                  <a:schemeClr val="tx1"/>
+                </a:solidFill>
+                <a:effectLst/>
+                <a:latin typeface="KoPub돋움체 Medium" panose="00000600000000000000" pitchFamily="2" charset="-127"/>
+                <a:ea typeface="KoPub돋움체 Medium" panose="00000600000000000000" pitchFamily="2" charset="-127"/>
+                <a:cs typeface="+mn-cs"/>
+              </a:rPr>
+              <a:t>, </a:t>
+            </a:r>
+            <a:r>
+              <a:rPr lang="ko-KR" altLang="en-US" sz="1200" b="0" i="0" kern="1200" dirty="0">
+                <a:solidFill>
+                  <a:schemeClr val="tx1"/>
+                </a:solidFill>
+                <a:effectLst/>
+                <a:latin typeface="KoPub돋움체 Medium" panose="00000600000000000000" pitchFamily="2" charset="-127"/>
+                <a:ea typeface="KoPub돋움체 Medium" panose="00000600000000000000" pitchFamily="2" charset="-127"/>
+                <a:cs typeface="+mn-cs"/>
+              </a:rPr>
+              <a:t>심근경색</a:t>
+            </a:r>
+            <a:r>
+              <a:rPr lang="en-US" altLang="ko-KR" sz="1200" b="0" i="0" kern="1200" dirty="0">
+                <a:solidFill>
+                  <a:schemeClr val="tx1"/>
+                </a:solidFill>
+                <a:effectLst/>
+                <a:latin typeface="KoPub돋움체 Medium" panose="00000600000000000000" pitchFamily="2" charset="-127"/>
+                <a:ea typeface="KoPub돋움체 Medium" panose="00000600000000000000" pitchFamily="2" charset="-127"/>
+                <a:cs typeface="+mn-cs"/>
+              </a:rPr>
+              <a:t>, </a:t>
+            </a:r>
+            <a:r>
+              <a:rPr lang="ko-KR" altLang="en-US" sz="1200" b="0" i="0" kern="1200" dirty="0">
+                <a:solidFill>
+                  <a:schemeClr val="tx1"/>
+                </a:solidFill>
+                <a:effectLst/>
+                <a:latin typeface="KoPub돋움체 Medium" panose="00000600000000000000" pitchFamily="2" charset="-127"/>
+                <a:ea typeface="KoPub돋움체 Medium" panose="00000600000000000000" pitchFamily="2" charset="-127"/>
+                <a:cs typeface="+mn-cs"/>
+              </a:rPr>
+              <a:t>심부전</a:t>
+            </a:r>
+            <a:r>
+              <a:rPr lang="en-US" altLang="ko-KR" sz="1200" b="0" i="0" kern="1200" dirty="0">
+                <a:solidFill>
+                  <a:schemeClr val="tx1"/>
+                </a:solidFill>
+                <a:effectLst/>
+                <a:latin typeface="KoPub돋움체 Medium" panose="00000600000000000000" pitchFamily="2" charset="-127"/>
+                <a:ea typeface="KoPub돋움체 Medium" panose="00000600000000000000" pitchFamily="2" charset="-127"/>
+                <a:cs typeface="+mn-cs"/>
+              </a:rPr>
+              <a:t>, </a:t>
+            </a:r>
+            <a:r>
+              <a:rPr lang="ko-KR" altLang="en-US" sz="1200" b="0" i="0" kern="1200" dirty="0">
+                <a:solidFill>
+                  <a:schemeClr val="tx1"/>
+                </a:solidFill>
+                <a:effectLst/>
+                <a:latin typeface="KoPub돋움체 Medium" panose="00000600000000000000" pitchFamily="2" charset="-127"/>
+                <a:ea typeface="KoPub돋움체 Medium" panose="00000600000000000000" pitchFamily="2" charset="-127"/>
+                <a:cs typeface="+mn-cs"/>
+              </a:rPr>
+              <a:t>대동맥류</a:t>
+            </a:r>
+            <a:r>
+              <a:rPr lang="en-US" altLang="ko-KR" sz="1200" b="0" i="0" kern="1200" dirty="0">
+                <a:solidFill>
+                  <a:schemeClr val="tx1"/>
+                </a:solidFill>
+                <a:effectLst/>
+                <a:latin typeface="KoPub돋움체 Medium" panose="00000600000000000000" pitchFamily="2" charset="-127"/>
+                <a:ea typeface="KoPub돋움체 Medium" panose="00000600000000000000" pitchFamily="2" charset="-127"/>
+                <a:cs typeface="+mn-cs"/>
+              </a:rPr>
+              <a:t>.</a:t>
+            </a:r>
+            <a:r>
+              <a:rPr lang="ko-KR" altLang="en-US" sz="1200" b="0" i="0" kern="1200" dirty="0">
+                <a:solidFill>
+                  <a:schemeClr val="tx1"/>
+                </a:solidFill>
+                <a:effectLst/>
+                <a:latin typeface="KoPub돋움체 Medium" panose="00000600000000000000" pitchFamily="2" charset="-127"/>
+                <a:ea typeface="KoPub돋움체 Medium" panose="00000600000000000000" pitchFamily="2" charset="-127"/>
+                <a:cs typeface="+mn-cs"/>
+              </a:rPr>
+              <a:t> 이러한 </a:t>
+            </a:r>
+            <a:r>
+              <a:rPr lang="en-US" altLang="ko-KR" sz="1200" b="0" i="0" kern="1200" dirty="0">
+                <a:solidFill>
+                  <a:schemeClr val="tx1"/>
+                </a:solidFill>
+                <a:effectLst/>
+                <a:latin typeface="KoPub돋움체 Medium" panose="00000600000000000000" pitchFamily="2" charset="-127"/>
+                <a:ea typeface="KoPub돋움체 Medium" panose="00000600000000000000" pitchFamily="2" charset="-127"/>
+                <a:cs typeface="+mn-cs"/>
+              </a:rPr>
+              <a:t>MACE</a:t>
+            </a:r>
+            <a:r>
+              <a:rPr lang="ko-KR" altLang="en-US" sz="1200" b="0" i="0" kern="1200" dirty="0">
+                <a:solidFill>
+                  <a:schemeClr val="tx1"/>
+                </a:solidFill>
+                <a:effectLst/>
+                <a:latin typeface="KoPub돋움체 Medium" panose="00000600000000000000" pitchFamily="2" charset="-127"/>
+                <a:ea typeface="KoPub돋움체 Medium" panose="00000600000000000000" pitchFamily="2" charset="-127"/>
+                <a:cs typeface="+mn-cs"/>
+              </a:rPr>
+              <a:t>는 환자의 사망 위험과 관련이 있는 것으로 나타났습니다</a:t>
+            </a:r>
+            <a:r>
+              <a:rPr lang="en-US" altLang="ko-KR" sz="1200" b="0" i="0" kern="1200" dirty="0">
+                <a:solidFill>
+                  <a:schemeClr val="tx1"/>
+                </a:solidFill>
+                <a:effectLst/>
+                <a:latin typeface="KoPub돋움체 Medium" panose="00000600000000000000" pitchFamily="2" charset="-127"/>
+                <a:ea typeface="KoPub돋움체 Medium" panose="00000600000000000000" pitchFamily="2" charset="-127"/>
+                <a:cs typeface="+mn-cs"/>
+              </a:rPr>
+              <a:t>.</a:t>
+            </a:r>
+            <a:r>
+              <a:rPr lang="ko-KR" altLang="ko-KR" sz="1200" b="0" i="0" u="none" strike="noStrike" kern="1200" dirty="0">
+                <a:solidFill>
+                  <a:schemeClr val="tx1"/>
+                </a:solidFill>
+                <a:effectLst/>
+                <a:latin typeface="KoPub돋움체 Medium" panose="00000600000000000000" pitchFamily="2" charset="-127"/>
+                <a:ea typeface="KoPub돋움체 Medium" panose="00000600000000000000" pitchFamily="2" charset="-127"/>
+                <a:cs typeface="+mn-cs"/>
+              </a:rPr>
+              <a:t> 사람이 사망에 이르는 과정에는 중간 단계가 있잖아요. 심장마비를 겪고, 또 뇌졸중을 겪고, 그 다음 사망하는 </a:t>
             </a:r>
             <a:r>
               <a:rPr lang="ko-KR" altLang="ko-KR" sz="1200" b="0" i="0" u="none" strike="noStrike" kern="1200" dirty="0" err="1">
